--- a/entregables/presentacion-ampliada/Presentacion_Ampliada.pptx
+++ b/entregables/presentacion-ampliada/Presentacion_Ampliada.pptx
@@ -9578,7 +9578,7 @@
               </a:defRPr>
             </a:pPr>
             <a:r>
-              <a:t>William Ortiz · Herlin Echeverry · Pablo Arango · Daniel Celis</a:t>
+              <a:t>William Ortiz · Herlin Echeverry · Pablo Arango · Bryan Martínez Villamarín</a:t>
             </a:r>
           </a:p>
         </p:txBody>
